--- a/livro_ia_educacao/saida/pptx/Cap19_slides.pptx
+++ b/livro_ia_educacao/saida/pptx/Cap19_slides.pptx
@@ -9822,11 +9822,11 @@
         <p:spPr>
           <a:xfrm>
             <a:off x="548640" y="1417320"/>
-            <a:ext cx="11064240" cy="762000"/>
+            <a:ext cx="11064240" cy="682752"/>
           </a:xfrm>
           <a:prstGeom prst="roundRect">
             <a:avLst>
-              <a:gd name="adj" fmla="val 14400"/>
+              <a:gd name="adj" fmla="val 16071"/>
             </a:avLst>
           </a:prstGeom>
           <a:solidFill>
@@ -9853,7 +9853,7 @@
         <p:spPr>
           <a:xfrm>
             <a:off x="731520" y="1417320"/>
-            <a:ext cx="548640" cy="762000"/>
+            <a:ext cx="548640" cy="682752"/>
           </a:xfrm>
           <a:prstGeom prst="rect">
             <a:avLst/>
@@ -9889,7 +9889,7 @@
         <p:spPr>
           <a:xfrm>
             <a:off x="1463040" y="1417320"/>
-            <a:ext cx="9966960" cy="762000"/>
+            <a:ext cx="9966960" cy="682752"/>
           </a:xfrm>
           <a:prstGeom prst="rect">
             <a:avLst/>
@@ -9924,12 +9924,12 @@
         </p:nvSpPr>
         <p:spPr>
           <a:xfrm>
-            <a:off x="548640" y="2289048"/>
-            <a:ext cx="11064240" cy="762000"/>
+            <a:off x="548640" y="2209800"/>
+            <a:ext cx="11064240" cy="682752"/>
           </a:xfrm>
           <a:prstGeom prst="roundRect">
             <a:avLst>
-              <a:gd name="adj" fmla="val 14400"/>
+              <a:gd name="adj" fmla="val 16071"/>
             </a:avLst>
           </a:prstGeom>
           <a:solidFill>
@@ -9955,8 +9955,8 @@
         </p:nvSpPr>
         <p:spPr>
           <a:xfrm>
-            <a:off x="731520" y="2289048"/>
-            <a:ext cx="548640" cy="762000"/>
+            <a:off x="731520" y="2209800"/>
+            <a:ext cx="548640" cy="682752"/>
           </a:xfrm>
           <a:prstGeom prst="rect">
             <a:avLst/>
@@ -9991,8 +9991,8 @@
         </p:nvSpPr>
         <p:spPr>
           <a:xfrm>
-            <a:off x="1463040" y="2289048"/>
-            <a:ext cx="9966960" cy="762000"/>
+            <a:off x="1463040" y="2209800"/>
+            <a:ext cx="9966960" cy="682752"/>
           </a:xfrm>
           <a:prstGeom prst="rect">
             <a:avLst/>
@@ -10027,12 +10027,12 @@
         </p:nvSpPr>
         <p:spPr>
           <a:xfrm>
-            <a:off x="548640" y="3160776"/>
-            <a:ext cx="11064240" cy="762000"/>
+            <a:off x="548640" y="3002280"/>
+            <a:ext cx="11064240" cy="682752"/>
           </a:xfrm>
           <a:prstGeom prst="roundRect">
             <a:avLst>
-              <a:gd name="adj" fmla="val 14400"/>
+              <a:gd name="adj" fmla="val 16071"/>
             </a:avLst>
           </a:prstGeom>
           <a:solidFill>
@@ -10058,8 +10058,8 @@
         </p:nvSpPr>
         <p:spPr>
           <a:xfrm>
-            <a:off x="731520" y="3160776"/>
-            <a:ext cx="548640" cy="762000"/>
+            <a:off x="731520" y="3002280"/>
+            <a:ext cx="548640" cy="682752"/>
           </a:xfrm>
           <a:prstGeom prst="rect">
             <a:avLst/>
@@ -10094,8 +10094,8 @@
         </p:nvSpPr>
         <p:spPr>
           <a:xfrm>
-            <a:off x="1463040" y="3160776"/>
-            <a:ext cx="9966960" cy="762000"/>
+            <a:off x="1463040" y="3002280"/>
+            <a:ext cx="9966960" cy="682752"/>
           </a:xfrm>
           <a:prstGeom prst="rect">
             <a:avLst/>
@@ -10130,12 +10130,12 @@
         </p:nvSpPr>
         <p:spPr>
           <a:xfrm>
-            <a:off x="548640" y="4032504"/>
-            <a:ext cx="11064240" cy="762000"/>
+            <a:off x="548640" y="3794760"/>
+            <a:ext cx="11064240" cy="682752"/>
           </a:xfrm>
           <a:prstGeom prst="roundRect">
             <a:avLst>
-              <a:gd name="adj" fmla="val 14400"/>
+              <a:gd name="adj" fmla="val 16071"/>
             </a:avLst>
           </a:prstGeom>
           <a:solidFill>
@@ -10161,8 +10161,8 @@
         </p:nvSpPr>
         <p:spPr>
           <a:xfrm>
-            <a:off x="731520" y="4032504"/>
-            <a:ext cx="548640" cy="762000"/>
+            <a:off x="731520" y="3794760"/>
+            <a:ext cx="548640" cy="682752"/>
           </a:xfrm>
           <a:prstGeom prst="rect">
             <a:avLst/>
@@ -10197,8 +10197,8 @@
         </p:nvSpPr>
         <p:spPr>
           <a:xfrm>
-            <a:off x="1463040" y="4032504"/>
-            <a:ext cx="9966960" cy="762000"/>
+            <a:off x="1463040" y="3794760"/>
+            <a:ext cx="9966960" cy="682752"/>
           </a:xfrm>
           <a:prstGeom prst="rect">
             <a:avLst/>
@@ -10233,12 +10233,12 @@
         </p:nvSpPr>
         <p:spPr>
           <a:xfrm>
-            <a:off x="548640" y="4904232"/>
-            <a:ext cx="11064240" cy="762000"/>
+            <a:off x="548640" y="4587240"/>
+            <a:ext cx="11064240" cy="682752"/>
           </a:xfrm>
           <a:prstGeom prst="roundRect">
             <a:avLst>
-              <a:gd name="adj" fmla="val 14400"/>
+              <a:gd name="adj" fmla="val 16071"/>
             </a:avLst>
           </a:prstGeom>
           <a:solidFill>
@@ -10264,8 +10264,8 @@
         </p:nvSpPr>
         <p:spPr>
           <a:xfrm>
-            <a:off x="731520" y="4904232"/>
-            <a:ext cx="548640" cy="762000"/>
+            <a:off x="731520" y="4587240"/>
+            <a:ext cx="548640" cy="682752"/>
           </a:xfrm>
           <a:prstGeom prst="rect">
             <a:avLst/>
@@ -10300,8 +10300,8 @@
         </p:nvSpPr>
         <p:spPr>
           <a:xfrm>
-            <a:off x="1463040" y="4904232"/>
-            <a:ext cx="9966960" cy="762000"/>
+            <a:off x="1463040" y="4587240"/>
+            <a:ext cx="9966960" cy="682752"/>
           </a:xfrm>
           <a:prstGeom prst="rect">
             <a:avLst/>
@@ -10336,12 +10336,12 @@
         </p:nvSpPr>
         <p:spPr>
           <a:xfrm>
-            <a:off x="548640" y="5775960"/>
-            <a:ext cx="11064240" cy="762000"/>
+            <a:off x="548640" y="5379720"/>
+            <a:ext cx="11064240" cy="682752"/>
           </a:xfrm>
           <a:prstGeom prst="roundRect">
             <a:avLst>
-              <a:gd name="adj" fmla="val 14400"/>
+              <a:gd name="adj" fmla="val 16071"/>
             </a:avLst>
           </a:prstGeom>
           <a:solidFill>
@@ -10367,8 +10367,8 @@
         </p:nvSpPr>
         <p:spPr>
           <a:xfrm>
-            <a:off x="731520" y="5775960"/>
-            <a:ext cx="548640" cy="762000"/>
+            <a:off x="731520" y="5379720"/>
+            <a:ext cx="548640" cy="682752"/>
           </a:xfrm>
           <a:prstGeom prst="rect">
             <a:avLst/>
@@ -10403,8 +10403,8 @@
         </p:nvSpPr>
         <p:spPr>
           <a:xfrm>
-            <a:off x="1463040" y="5775960"/>
-            <a:ext cx="9966960" cy="762000"/>
+            <a:off x="1463040" y="5379720"/>
+            <a:ext cx="9966960" cy="682752"/>
           </a:xfrm>
           <a:prstGeom prst="rect">
             <a:avLst/>
